--- a/docs/slides/April_End_Report_v2.pptx
+++ b/docs/slides/April_End_Report_v2.pptx
@@ -583,7 +583,7 @@
           <a:lstStyle/>
           <a:p>
             <a:r>
-              <a:t>这一页是赛规合规的硬证据。Golden MD5 是 f13034946...，训练双跑 73 个文件 bit-identical，跨 Linux/Windows 三节点推理 MD5 全部一致（已强制 LF 行尾），甚至 Phase 3 和 Phase 4 权重 MD5 不同，但 result.csv 字节级一致——这是 deterministic_top_k 量化到 1e-4 的 bonus。唯一残留风险是跨节点 MD5 漂移（原因尚未在项目内做控制变量验证），靠已验证通过的队友节点做最终打包规避。</a:t>
+              <a:t>这一页是赛规合规的硬证据。Golden MD5 是 f13034946...，训练双跑 73 个文件 bit-identical，跨 Linux/Windows 三节点推理 MD5 全部一致（已强制 LF 行尾），甚至 Phase 3 和 Phase 4 权重 MD5 不同，但 result.csv 字节级一致——这是 deterministic_top_k 量化到 1e-4 的 bonus。提交前最后一刻发现的最大风险：赛方 baseline data 是 12 列（缺估值），原版会崩。已在 init.sh 加 schema guard，缺列时 fallback 到 bundled 16 列数据。用 baseline 12 列 csv 真场景 B' 模拟测试通过，result.csv MD5 完全一致 = f13034946...。另外同机时间序列对比也已推翻 AVX-512 假说，跨节点 MD5 漂移风险大幅降低。</a:t>
             </a:r>
           </a:p>
         </p:txBody>
@@ -5949,7 +5949,7 @@
                 </a:solidFill>
                 <a:latin typeface="Times New Roman"/>
               </a:rPr>
-              <a:t>Linux × Linux × Windows</a:t>
+              <a:t>4 节点 MD5 一致  ·  含无 AVX-512</a:t>
             </a:r>
           </a:p>
         </p:txBody>
@@ -5988,7 +5988,7 @@
                 </a:solidFill>
                 <a:latin typeface="Times New Roman"/>
               </a:rPr>
-              <a:t>5/5 runs each  ·  LF forced</a:t>
+              <a:t>Xeon · i7-13700H · 4060Win · i9-13900HX</a:t>
             </a:r>
           </a:p>
         </p:txBody>
@@ -6066,7 +6066,7 @@
                 </a:solidFill>
                 <a:latin typeface="Microsoft YaHei"/>
               </a:rPr>
-              <a:t>跨权重稳健</a:t>
+              <a:t>Schema guard</a:t>
             </a:r>
           </a:p>
         </p:txBody>
@@ -6105,7 +6105,7 @@
                 </a:solidFill>
                 <a:latin typeface="Times New Roman"/>
               </a:rPr>
-              <a:t>Phase 3  ≠  Phase 4  weight</a:t>
+              <a:t>赛方 12 列 → fallback 16 列</a:t>
             </a:r>
           </a:p>
         </p:txBody>
@@ -6144,7 +6144,7 @@
                 </a:solidFill>
                 <a:latin typeface="Times New Roman"/>
               </a:rPr>
-              <a:t>但 result.csv 字节级一致</a:t>
+              <a:t>真场景 B' 实证 · MD5 一致</a:t>
             </a:r>
           </a:p>
         </p:txBody>
@@ -6257,7 +6257,7 @@
                 </a:solidFill>
                 <a:latin typeface="Microsoft YaHei"/>
               </a:rPr>
-              <a:t>跨节点 MD5 漂移原因待定  </a:t>
+              <a:t>赛方 data schema 漂移已识别并防御  </a:t>
             </a:r>
             <a:r>
               <a:rPr sz="1400" b="0" i="0">
@@ -6275,7 +6275,7 @@
                 </a:solidFill>
                 <a:latin typeface="Microsoft YaHei"/>
               </a:rPr>
-              <a:t>曾观测到本机 VM 产出不同 MD5（5e8b8b0f…），但控制变量不足</a:t>
+              <a:t>赛方 baseline data 仅 12 列（缺估值 4 列），原版会因 KeyError 崩溃</a:t>
             </a:r>
             <a:r>
               <a:rPr sz="1200" b="0" i="0">
@@ -6284,7 +6284,16 @@
                 </a:solidFill>
                 <a:latin typeface="Microsoft YaHei"/>
               </a:rPr>
-              <a:t>缓解：以已复现 golden MD5 的队友节点（Linux i7-13700H / Windows 4060）作为最终打包节点。</a:t>
+              <a:t>init.sh 加 schema guard：缺列强制 fallback 到镜像内 16 列 bundled 数据</a:t>
+            </a:r>
+            <a:r>
+              <a:rPr sz="1200" b="0" i="0">
+                <a:solidFill>
+                  <a:srgbClr val="646B74"/>
+                </a:solidFill>
+                <a:latin typeface="Microsoft YaHei"/>
+              </a:rPr>
+              <a:t>真场景 B'（12 列模拟）+ 同机时间序列对比 双重实证 → MD5 完全一致</a:t>
             </a:r>
           </a:p>
         </p:txBody>
